--- a/진로설계4/2026-2/진로설계4_OT.pptx
+++ b/진로설계4/2026-2/진로설계4_OT.pptx
@@ -5,13 +5,14 @@
     <p:sldMasterId id="2147483648" r:id="rId1"/>
   </p:sldMasterIdLst>
   <p:notesMasterIdLst>
-    <p:notesMasterId r:id="rId6"/>
+    <p:notesMasterId r:id="rId7"/>
   </p:notesMasterIdLst>
   <p:sldIdLst>
     <p:sldId id="375" r:id="rId2"/>
     <p:sldId id="580" r:id="rId3"/>
     <p:sldId id="571" r:id="rId4"/>
-    <p:sldId id="364" r:id="rId5"/>
+    <p:sldId id="581" r:id="rId5"/>
+    <p:sldId id="364" r:id="rId6"/>
   </p:sldIdLst>
   <p:sldSz cx="12192000" cy="6858000"/>
   <p:notesSz cx="6858000" cy="9144000"/>
@@ -211,7 +212,7 @@
           <a:p>
             <a:fld id="{4A5E00EF-AEA4-43E2-9451-8F9C59A39471}" type="datetimeFigureOut">
               <a:rPr lang="ko-KR" altLang="en-US" smtClean="0"/>
-              <a:t>2026-09-03</a:t>
+              <a:t>2026-10-15</a:t>
             </a:fld>
             <a:endParaRPr lang="ko-KR" altLang="en-US"/>
           </a:p>
@@ -633,7 +634,7 @@
           <a:p>
             <a:fld id="{CD32C56F-BD27-4999-9E6D-D4EACE3DA9F4}" type="datetime1">
               <a:rPr lang="ko-KR" altLang="en-US" smtClean="0"/>
-              <a:t>2026-09-03</a:t>
+              <a:t>2026-10-15</a:t>
             </a:fld>
             <a:endParaRPr lang="ko-KR" altLang="en-US"/>
           </a:p>
@@ -847,7 +848,7 @@
           <a:p>
             <a:fld id="{8EF4A19C-72C8-45CA-8E3F-68A7FA345D6C}" type="datetime1">
               <a:rPr lang="ko-KR" altLang="en-US" smtClean="0"/>
-              <a:t>2026-09-03</a:t>
+              <a:t>2026-10-15</a:t>
             </a:fld>
             <a:endParaRPr lang="ko-KR" altLang="en-US"/>
           </a:p>
@@ -1071,7 +1072,7 @@
           <a:p>
             <a:fld id="{56A175B2-010B-4341-954C-5F8F5C70B124}" type="datetime1">
               <a:rPr lang="ko-KR" altLang="en-US" smtClean="0"/>
-              <a:t>2026-09-03</a:t>
+              <a:t>2026-10-15</a:t>
             </a:fld>
             <a:endParaRPr lang="ko-KR" altLang="en-US"/>
           </a:p>
@@ -1285,7 +1286,7 @@
           <a:p>
             <a:fld id="{16B83F9E-22C9-45CA-9E85-070F1D3EF530}" type="datetime1">
               <a:rPr lang="ko-KR" altLang="en-US" smtClean="0"/>
-              <a:t>2026-09-03</a:t>
+              <a:t>2026-10-15</a:t>
             </a:fld>
             <a:endParaRPr lang="ko-KR" altLang="en-US"/>
           </a:p>
@@ -1576,7 +1577,7 @@
           <a:p>
             <a:fld id="{03278F45-FB3C-4C4D-B89A-7BC3F5F229F6}" type="datetime1">
               <a:rPr lang="ko-KR" altLang="en-US" smtClean="0"/>
-              <a:t>2026-09-03</a:t>
+              <a:t>2026-10-15</a:t>
             </a:fld>
             <a:endParaRPr lang="ko-KR" altLang="en-US"/>
           </a:p>
@@ -1969,7 +1970,7 @@
           <a:p>
             <a:fld id="{38FDAC3C-35A6-415C-9F03-738A6AC328B1}" type="datetime1">
               <a:rPr lang="ko-KR" altLang="en-US" smtClean="0"/>
-              <a:t>2026-09-03</a:t>
+              <a:t>2026-10-15</a:t>
             </a:fld>
             <a:endParaRPr lang="ko-KR" altLang="en-US"/>
           </a:p>
@@ -3563,7 +3564,7 @@
           <a:p>
             <a:fld id="{507A0DF1-AEE6-4B0D-89D2-351E7B3EF65C}" type="datetime1">
               <a:rPr lang="ko-KR" altLang="en-US" smtClean="0"/>
-              <a:t>2026-09-03</a:t>
+              <a:t>2026-10-15</a:t>
             </a:fld>
             <a:endParaRPr lang="ko-KR" altLang="en-US"/>
           </a:p>
@@ -3991,7 +3992,7 @@
           <a:p>
             <a:fld id="{CA93B8C9-630F-4D57-944D-04FD37CECCD3}" type="datetime1">
               <a:rPr lang="ko-KR" altLang="en-US" smtClean="0"/>
-              <a:t>2026-09-03</a:t>
+              <a:t>2026-10-15</a:t>
             </a:fld>
             <a:endParaRPr lang="ko-KR" altLang="en-US"/>
           </a:p>
@@ -4148,7 +4149,7 @@
           <a:p>
             <a:fld id="{E986165A-AC43-4902-9541-874ECD310BA3}" type="datetime1">
               <a:rPr lang="ko-KR" altLang="en-US" smtClean="0"/>
-              <a:t>2026-09-03</a:t>
+              <a:t>2026-10-15</a:t>
             </a:fld>
             <a:endParaRPr lang="ko-KR" altLang="en-US"/>
           </a:p>
@@ -4475,7 +4476,7 @@
           <a:p>
             <a:fld id="{47E6EE6D-2B0E-43A9-87A2-7354CDB998F4}" type="datetime1">
               <a:rPr lang="ko-KR" altLang="en-US" smtClean="0"/>
-              <a:t>2026-09-03</a:t>
+              <a:t>2026-10-15</a:t>
             </a:fld>
             <a:endParaRPr lang="ko-KR" altLang="en-US"/>
           </a:p>
@@ -4779,7 +4780,7 @@
           <a:p>
             <a:fld id="{5CC5944E-0BC8-4FAA-9F94-6B4B05834E10}" type="datetime1">
               <a:rPr lang="ko-KR" altLang="en-US" smtClean="0"/>
-              <a:t>2026-09-03</a:t>
+              <a:t>2026-10-15</a:t>
             </a:fld>
             <a:endParaRPr lang="ko-KR" altLang="en-US"/>
           </a:p>
@@ -7860,6 +7861,129 @@
         <p:cNvPr id="1" name="">
           <a:extLst>
             <a:ext uri="{FF2B5EF4-FFF2-40B4-BE49-F238E27FC236}">
+              <a16:creationId xmlns:a16="http://schemas.microsoft.com/office/drawing/2014/main" id="{F0F6FCCD-B993-62F3-E85B-09CB6D2B25CA}"/>
+            </a:ext>
+          </a:extLst>
+        </p:cNvPr>
+        <p:cNvGrpSpPr/>
+        <p:nvPr/>
+      </p:nvGrpSpPr>
+      <p:grpSpPr>
+        <a:xfrm>
+          <a:off x="0" y="0"/>
+          <a:ext cx="0" cy="0"/>
+          <a:chOff x="0" y="0"/>
+          <a:chExt cx="0" cy="0"/>
+        </a:xfrm>
+      </p:grpSpPr>
+      <p:sp>
+        <p:nvSpPr>
+          <p:cNvPr id="2" name="제목 1">
+            <a:extLst>
+              <a:ext uri="{FF2B5EF4-FFF2-40B4-BE49-F238E27FC236}">
+                <a16:creationId xmlns:a16="http://schemas.microsoft.com/office/drawing/2014/main" id="{017993A3-266B-DDE2-562D-1DC7D5B15BC6}"/>
+              </a:ext>
+            </a:extLst>
+          </p:cNvPr>
+          <p:cNvSpPr>
+            <a:spLocks noGrp="1"/>
+          </p:cNvSpPr>
+          <p:nvPr>
+            <p:ph type="title"/>
+          </p:nvPr>
+        </p:nvSpPr>
+        <p:spPr/>
+        <p:txBody>
+          <a:bodyPr/>
+          <a:lstStyle/>
+          <a:p>
+            <a:r>
+              <a:rPr lang="ko-KR" altLang="en-US" dirty="0"/>
+              <a:t>수업일정</a:t>
+            </a:r>
+          </a:p>
+        </p:txBody>
+      </p:sp>
+      <p:sp>
+        <p:nvSpPr>
+          <p:cNvPr id="4" name="슬라이드 번호 개체 틀 3">
+            <a:extLst>
+              <a:ext uri="{FF2B5EF4-FFF2-40B4-BE49-F238E27FC236}">
+                <a16:creationId xmlns:a16="http://schemas.microsoft.com/office/drawing/2014/main" id="{EE9DDB65-83CE-BA80-8370-FFFA4A79A778}"/>
+              </a:ext>
+            </a:extLst>
+          </p:cNvPr>
+          <p:cNvSpPr>
+            <a:spLocks noGrp="1"/>
+          </p:cNvSpPr>
+          <p:nvPr>
+            <p:ph type="sldNum" sz="quarter" idx="12"/>
+          </p:nvPr>
+        </p:nvSpPr>
+        <p:spPr/>
+        <p:txBody>
+          <a:bodyPr/>
+          <a:lstStyle/>
+          <a:p>
+            <a:fld id="{109C872D-39A9-4065-8BF3-6A613116E2A1}" type="slidenum">
+              <a:rPr lang="ko-KR" altLang="en-US" smtClean="0"/>
+              <a:t>4</a:t>
+            </a:fld>
+            <a:endParaRPr lang="ko-KR" altLang="en-US"/>
+          </a:p>
+        </p:txBody>
+      </p:sp>
+      <p:pic>
+        <p:nvPicPr>
+          <p:cNvPr id="6" name="그림 5">
+            <a:extLst>
+              <a:ext uri="{FF2B5EF4-FFF2-40B4-BE49-F238E27FC236}">
+                <a16:creationId xmlns:a16="http://schemas.microsoft.com/office/drawing/2014/main" id="{3D2E4C14-4F07-6E84-E8B5-5C2F7463120B}"/>
+              </a:ext>
+            </a:extLst>
+          </p:cNvPr>
+          <p:cNvPicPr>
+            <a:picLocks noChangeAspect="1"/>
+          </p:cNvPicPr>
+          <p:nvPr/>
+        </p:nvPicPr>
+        <p:blipFill>
+          <a:blip r:embed="rId2"/>
+          <a:stretch>
+            <a:fillRect/>
+          </a:stretch>
+        </p:blipFill>
+        <p:spPr>
+          <a:xfrm>
+            <a:off x="2472776" y="1665591"/>
+            <a:ext cx="3210766" cy="3706974"/>
+          </a:xfrm>
+          <a:prstGeom prst="rect">
+            <a:avLst/>
+          </a:prstGeom>
+        </p:spPr>
+      </p:pic>
+    </p:spTree>
+    <p:extLst>
+      <p:ext uri="{BB962C8B-B14F-4D97-AF65-F5344CB8AC3E}">
+        <p14:creationId xmlns:p14="http://schemas.microsoft.com/office/powerpoint/2010/main" val="3495334505"/>
+      </p:ext>
+    </p:extLst>
+  </p:cSld>
+  <p:clrMapOvr>
+    <a:masterClrMapping/>
+  </p:clrMapOvr>
+</p:sld>
+</file>
+
+<file path=ppt/slides/slide5.xml><?xml version="1.0" encoding="utf-8"?>
+<p:sld xmlns:a="http://schemas.openxmlformats.org/drawingml/2006/main" xmlns:r="http://schemas.openxmlformats.org/officeDocument/2006/relationships" xmlns:p="http://schemas.openxmlformats.org/presentationml/2006/main">
+  <p:cSld>
+    <p:spTree>
+      <p:nvGrpSpPr>
+        <p:cNvPr id="1" name="">
+          <a:extLst>
+            <a:ext uri="{FF2B5EF4-FFF2-40B4-BE49-F238E27FC236}">
               <a16:creationId xmlns:a16="http://schemas.microsoft.com/office/drawing/2014/main" id="{9AC8B0EB-74B1-B51C-A4E6-7DD41C0B047F}"/>
             </a:ext>
           </a:extLst>
@@ -7980,7 +8104,7 @@
           <a:p>
             <a:fld id="{109C872D-39A9-4065-8BF3-6A613116E2A1}" type="slidenum">
               <a:rPr lang="ko-KR" altLang="en-US" smtClean="0"/>
-              <a:t>4</a:t>
+              <a:t>5</a:t>
             </a:fld>
             <a:endParaRPr lang="ko-KR" altLang="en-US"/>
           </a:p>
